--- a/presentation/slides.pptx
+++ b/presentation/slides.pptx
@@ -3641,7 +3641,7 @@
                 <a:latin typeface="Calibri"/>
                 <a:ea typeface="Calibri"/>
               </a:rPr>
-              <a:t>05  ·  KEY FEATURES</a:t>
+              <a:t>05  ·  DASHBOARD</a:t>
             </a:r>
           </a:p>
         </p:txBody>
@@ -3674,7 +3674,7 @@
                 <a:latin typeface="Calibri"/>
                 <a:ea typeface="Calibri"/>
               </a:rPr>
-              <a:t>Six Features. All Implemented.</a:t>
+              <a:t>Control Tower Dashboard — What You See</a:t>
             </a:r>
           </a:p>
         </p:txBody>
@@ -3769,24 +3769,27 @@
             </a:r>
           </a:p>
           <a:p>
-            <a:endParaRPr lang="en-US" sz="1500" b="0">
-              <a:solidFill>
-                <a:srgbClr val="1B2A4A"/>
-              </a:solidFill>
-              <a:latin typeface="Calibri"/>
-              <a:ea typeface="Calibri"/>
-            </a:endParaRPr>
-          </a:p>
-          <a:p>
-            <a:r>
-              <a:rPr lang="en-US" sz="1500" b="0">
-                <a:solidFill>
-                  <a:srgbClr val="1B2A4A"/>
-                </a:solidFill>
-                <a:latin typeface="Calibri"/>
-                <a:ea typeface="Calibri"/>
-              </a:rPr>
-              <a:t>One click: extend Rotterdam strike by 48 h. Computes projected 96-hour duration, 1 impacted cold-chain shipment, $520,000 at risk, risk → CRITICAL.</a:t>
+            <a:r>
+              <a:rPr lang="en-US" sz="1500" b="0">
+                <a:solidFill>
+                  <a:srgbClr val="1B2A4A"/>
+                </a:solidFill>
+                <a:latin typeface="Calibri"/>
+                <a:ea typeface="Calibri"/>
+              </a:rPr>
+              <a:t/>
+            </a:r>
+          </a:p>
+          <a:p>
+            <a:r>
+              <a:rPr lang="en-US" sz="1500" b="0">
+                <a:solidFill>
+                  <a:srgbClr val="1B2A4A"/>
+                </a:solidFill>
+                <a:latin typeface="Calibri"/>
+                <a:ea typeface="Calibri"/>
+              </a:rPr>
+              <a:t>One click: extend Rotterdam strike +48 h. Dashboard shows: 96-hour duration, 2 impacted shipments, 2 cold-chain, $700,000 at risk, risk → CRITICAL.</a:t>
             </a:r>
           </a:p>
         </p:txBody>
@@ -4275,17 +4278,8 @@
                 <a:latin typeface="Calibri"/>
                 <a:ea typeface="Calibri"/>
               </a:rPr>
-              <a:t>COMPUTED RESULT</a:t>
-            </a:r>
-          </a:p>
-          <a:p>
-            <a:endParaRPr lang="en-US" sz="1600" b="0">
-              <a:solidFill>
-                <a:srgbClr val="FFFFFF"/>
-              </a:solidFill>
-              <a:latin typeface="Calibri"/>
-              <a:ea typeface="Calibri"/>
-            </a:endParaRPr>
+              <a:t>DASHBOARD RESULT</a:t>
+            </a:r>
           </a:p>
           <a:p>
             <a:r>
@@ -4296,6 +4290,18 @@
                 <a:latin typeface="Calibri"/>
                 <a:ea typeface="Calibri"/>
               </a:rPr>
+              <a:t/>
+            </a:r>
+          </a:p>
+          <a:p>
+            <a:r>
+              <a:rPr lang="en-US" sz="1600" b="0">
+                <a:solidFill>
+                  <a:srgbClr val="FFFFFF"/>
+                </a:solidFill>
+                <a:latin typeface="Calibri"/>
+                <a:ea typeface="Calibri"/>
+              </a:rPr>
               <a:t>Projected duration: 96 hours</a:t>
             </a:r>
           </a:p>
@@ -4308,7 +4314,7 @@
                 <a:latin typeface="Calibri"/>
                 <a:ea typeface="Calibri"/>
               </a:rPr>
-              <a:t>Shipments impacted: 1 (SHIP-001)</a:t>
+              <a:t>Shipments impacted: 2</a:t>
             </a:r>
           </a:p>
           <a:p>
@@ -4320,7 +4326,7 @@
                 <a:latin typeface="Calibri"/>
                 <a:ea typeface="Calibri"/>
               </a:rPr>
-              <a:t>Cold-chain at risk: 1 (Vaccines ❄️)</a:t>
+              <a:t>Cold-chain at risk: 2 (Vaccines ❌, Perishables ❌)</a:t>
             </a:r>
           </a:p>
           <a:p>
@@ -4332,7 +4338,7 @@
                 <a:latin typeface="Calibri"/>
                 <a:ea typeface="Calibri"/>
               </a:rPr>
-              <a:t>Cargo value at risk: $520,000</a:t>
+              <a:t>Cargo value at risk: $700,000</a:t>
             </a:r>
           </a:p>
           <a:p>
@@ -4403,7 +4409,7 @@
                 <a:latin typeface="Calibri"/>
                 <a:ea typeface="Calibri"/>
               </a:rPr>
-              <a:t>→ Both conditions met → Risk escalates to CRITICAL</a:t>
+              <a:t>→ Both conditions met (2 cold-chain shipments) → Risk escalates to CRITICAL</a:t>
             </a:r>
           </a:p>
         </p:txBody>
@@ -4540,7 +4546,7 @@
                 <a:latin typeface="Calibri"/>
                 <a:ea typeface="Calibri"/>
               </a:rPr>
-              <a:t>"What happens if the Rotterdam strike lasts another 48 hours?"  →  Answer in &lt; 2 seconds</a:t>
+              <a:t>"What if the Rotterdam strike lasts another 48 hours?"  →  2 shipments, $700k at risk, CRITICAL — answered in seconds</a:t>
             </a:r>
           </a:p>
         </p:txBody>
